--- a/Music Genre Classification Checkpoint 1.pptx
+++ b/Music Genre Classification Checkpoint 1.pptx
@@ -17,7 +17,6 @@
     <p:sldId id="271" r:id="rId11"/>
     <p:sldId id="270" r:id="rId12"/>
     <p:sldId id="262" r:id="rId13"/>
-    <p:sldId id="272" r:id="rId14"/>
   </p:sldIdLst>
   <p:sldSz cx="12192000" cy="6858000"/>
   <p:notesSz cx="6858000" cy="9144000"/>
@@ -116,6 +115,11 @@
       </a:defRPr>
     </a:lvl9pPr>
   </p:defaultTextStyle>
+  <p:extLst>
+    <p:ext uri="{EFAFB233-063F-42B5-8137-9DF3F51BA10A}">
+      <p15:sldGuideLst xmlns:p15="http://schemas.microsoft.com/office/powerpoint/2012/main"/>
+    </p:ext>
+  </p:extLst>
 </p:presentation>
 </file>
 
@@ -4575,167 +4579,6 @@
 </p:sld>
 </file>
 
-<file path=ppt/slides/slide13.xml><?xml version="1.0" encoding="utf-8"?>
-<p:sld xmlns:a="http://schemas.openxmlformats.org/drawingml/2006/main" xmlns:r="http://schemas.openxmlformats.org/officeDocument/2006/relationships" xmlns:p="http://schemas.openxmlformats.org/presentationml/2006/main">
-  <p:cSld>
-    <p:spTree>
-      <p:nvGrpSpPr>
-        <p:cNvPr id="1" name="">
-          <a:extLst>
-            <a:ext uri="{FF2B5EF4-FFF2-40B4-BE49-F238E27FC236}">
-              <a16:creationId xmlns:a16="http://schemas.microsoft.com/office/drawing/2014/main" id="{3429FDB6-FE2A-04EF-EEBD-FCF0454CFADD}"/>
-            </a:ext>
-          </a:extLst>
-        </p:cNvPr>
-        <p:cNvGrpSpPr/>
-        <p:nvPr/>
-      </p:nvGrpSpPr>
-      <p:grpSpPr>
-        <a:xfrm>
-          <a:off x="0" y="0"/>
-          <a:ext cx="0" cy="0"/>
-          <a:chOff x="0" y="0"/>
-          <a:chExt cx="0" cy="0"/>
-        </a:xfrm>
-      </p:grpSpPr>
-      <p:sp>
-        <p:nvSpPr>
-          <p:cNvPr id="2" name="Title 1">
-            <a:extLst>
-              <a:ext uri="{FF2B5EF4-FFF2-40B4-BE49-F238E27FC236}">
-                <a16:creationId xmlns:a16="http://schemas.microsoft.com/office/drawing/2014/main" id="{A5B8B0FD-7DFA-575C-F194-CA3E789D59B1}"/>
-              </a:ext>
-            </a:extLst>
-          </p:cNvPr>
-          <p:cNvSpPr>
-            <a:spLocks noGrp="1"/>
-          </p:cNvSpPr>
-          <p:nvPr>
-            <p:ph type="title"/>
-          </p:nvPr>
-        </p:nvSpPr>
-        <p:spPr>
-          <a:xfrm>
-            <a:off x="1261872" y="365760"/>
-            <a:ext cx="9692640" cy="827722"/>
-          </a:xfrm>
-        </p:spPr>
-        <p:txBody>
-          <a:bodyPr/>
-          <a:lstStyle/>
-          <a:p>
-            <a:r>
-              <a:rPr lang="en-US"/>
-              <a:t>Spectrogram Generation</a:t>
-            </a:r>
-          </a:p>
-        </p:txBody>
-      </p:sp>
-      <p:sp>
-        <p:nvSpPr>
-          <p:cNvPr id="5" name="AutoShape 2">
-            <a:extLst>
-              <a:ext uri="{FF2B5EF4-FFF2-40B4-BE49-F238E27FC236}">
-                <a16:creationId xmlns:a16="http://schemas.microsoft.com/office/drawing/2014/main" id="{5CDCCC55-DC2F-8D89-8CCC-9E00144E8744}"/>
-              </a:ext>
-            </a:extLst>
-          </p:cNvPr>
-          <p:cNvSpPr>
-            <a:spLocks noChangeAspect="1" noChangeArrowheads="1"/>
-          </p:cNvSpPr>
-          <p:nvPr/>
-        </p:nvSpPr>
-        <p:spPr bwMode="auto">
-          <a:xfrm>
-            <a:off x="5943600" y="3276600"/>
-            <a:ext cx="304800" cy="304800"/>
-          </a:xfrm>
-          <a:prstGeom prst="rect">
-            <a:avLst/>
-          </a:prstGeom>
-          <a:noFill/>
-          <a:extLst>
-            <a:ext uri="{909E8E84-426E-40DD-AFC4-6F175D3DCCD1}">
-              <a14:hiddenFill xmlns:a14="http://schemas.microsoft.com/office/drawing/2010/main">
-                <a:solidFill>
-                  <a:srgbClr val="FFFFFF"/>
-                </a:solidFill>
-              </a14:hiddenFill>
-            </a:ext>
-          </a:extLst>
-        </p:spPr>
-        <p:txBody>
-          <a:bodyPr vert="horz" wrap="square" lIns="91440" tIns="45720" rIns="91440" bIns="45720" numCol="1" anchor="t" anchorCtr="0" compatLnSpc="1">
-            <a:prstTxWarp prst="textNoShape">
-              <a:avLst/>
-            </a:prstTxWarp>
-          </a:bodyPr>
-          <a:lstStyle/>
-          <a:p>
-            <a:endParaRPr lang="en-US"/>
-          </a:p>
-        </p:txBody>
-      </p:sp>
-      <p:pic>
-        <p:nvPicPr>
-          <p:cNvPr id="1046" name="Picture 22">
-            <a:extLst>
-              <a:ext uri="{FF2B5EF4-FFF2-40B4-BE49-F238E27FC236}">
-                <a16:creationId xmlns:a16="http://schemas.microsoft.com/office/drawing/2014/main" id="{D1055480-80A6-9E0E-3FDC-0D53CCCF6C42}"/>
-              </a:ext>
-            </a:extLst>
-          </p:cNvPr>
-          <p:cNvPicPr>
-            <a:picLocks noChangeAspect="1" noChangeArrowheads="1"/>
-          </p:cNvPicPr>
-          <p:nvPr/>
-        </p:nvPicPr>
-        <p:blipFill>
-          <a:blip r:embed="rId2">
-            <a:extLst>
-              <a:ext uri="{28A0092B-C50C-407E-A947-70E740481C1C}">
-                <a14:useLocalDpi xmlns:a14="http://schemas.microsoft.com/office/drawing/2010/main" val="0"/>
-              </a:ext>
-            </a:extLst>
-          </a:blip>
-          <a:srcRect/>
-          <a:stretch>
-            <a:fillRect/>
-          </a:stretch>
-        </p:blipFill>
-        <p:spPr bwMode="auto">
-          <a:xfrm>
-            <a:off x="307144" y="1494472"/>
-            <a:ext cx="9692640" cy="4997768"/>
-          </a:xfrm>
-          <a:prstGeom prst="rect">
-            <a:avLst/>
-          </a:prstGeom>
-          <a:noFill/>
-          <a:extLst>
-            <a:ext uri="{909E8E84-426E-40DD-AFC4-6F175D3DCCD1}">
-              <a14:hiddenFill xmlns:a14="http://schemas.microsoft.com/office/drawing/2010/main">
-                <a:solidFill>
-                  <a:srgbClr val="FFFFFF"/>
-                </a:solidFill>
-              </a14:hiddenFill>
-            </a:ext>
-          </a:extLst>
-        </p:spPr>
-      </p:pic>
-    </p:spTree>
-    <p:extLst>
-      <p:ext uri="{BB962C8B-B14F-4D97-AF65-F5344CB8AC3E}">
-        <p14:creationId xmlns:p14="http://schemas.microsoft.com/office/powerpoint/2010/main" val="2814037045"/>
-      </p:ext>
-    </p:extLst>
-  </p:cSld>
-  <p:clrMapOvr>
-    <a:masterClrMapping/>
-  </p:clrMapOvr>
-</p:sld>
-</file>
-
 <file path=ppt/slides/slide2.xml><?xml version="1.0" encoding="utf-8"?>
 <p:sld xmlns:a="http://schemas.openxmlformats.org/drawingml/2006/main" xmlns:r="http://schemas.openxmlformats.org/officeDocument/2006/relationships" xmlns:p="http://schemas.openxmlformats.org/presentationml/2006/main">
   <p:cSld>
